--- a/dist/GRI-11-ESG-KPIs-Slides.pptx
+++ b/dist/GRI-11-ESG-KPIs-Slides.pptx
@@ -6100,6 +6100,84 @@
           </a:p>
         </p:txBody>
       </p:sp>
+      <p:sp>
+        <p:nvSpPr>
+          <p:cNvPr id="55" name="Text 53"/>
+          <p:cNvSpPr/>
+          <p:nvPr/>
+        </p:nvSpPr>
+        <p:spPr>
+          <a:xfrm>
+            <a:off x="640080" y="6272784"/>
+            <a:ext cx="9994392" cy="274320"/>
+          </a:xfrm>
+          <a:prstGeom prst="rect">
+            <a:avLst/>
+          </a:prstGeom>
+          <a:noFill/>
+          <a:ln/>
+        </p:spPr>
+        <p:txBody>
+          <a:bodyPr wrap="square" lIns="0" tIns="0" rIns="0" bIns="0" rtlCol="0" anchor="ctr"/>
+          <a:lstStyle/>
+          <a:p>
+            <a:pPr indent="0" marL="0">
+              <a:buNone/>
+            </a:pPr>
+            <a:r>
+              <a:rPr lang="en-US" sz="1200" dirty="0">
+                <a:solidFill>
+                  <a:srgbClr val="9AA8B8"/>
+                </a:solidFill>
+                <a:latin typeface="Liberation Sans" pitchFamily="34" charset="0"/>
+                <a:ea typeface="Liberation Sans" pitchFamily="34" charset="-122"/>
+                <a:cs typeface="Liberation Sans" pitchFamily="34" charset="-120"/>
+              </a:rPr>
+              <a:t>ESG KPIs for a refinery under GRI Sector Standard 11</a:t>
+            </a:r>
+            <a:endParaRPr lang="en-US" sz="1200" dirty="0"/>
+          </a:p>
+        </p:txBody>
+      </p:sp>
+      <p:sp>
+        <p:nvSpPr>
+          <p:cNvPr id="56" name="Text 54"/>
+          <p:cNvSpPr/>
+          <p:nvPr/>
+        </p:nvSpPr>
+        <p:spPr>
+          <a:xfrm>
+            <a:off x="11000232" y="6272784"/>
+            <a:ext cx="548640" cy="274320"/>
+          </a:xfrm>
+          <a:prstGeom prst="rect">
+            <a:avLst/>
+          </a:prstGeom>
+          <a:noFill/>
+          <a:ln/>
+        </p:spPr>
+        <p:txBody>
+          <a:bodyPr wrap="square" lIns="0" tIns="0" rIns="0" bIns="0" rtlCol="0" anchor="ctr"/>
+          <a:lstStyle/>
+          <a:p>
+            <a:pPr algn="r" indent="0" marL="0">
+              <a:buNone/>
+            </a:pPr>
+            <a:r>
+              <a:rPr lang="en-US" sz="1200" b="1" dirty="0">
+                <a:solidFill>
+                  <a:srgbClr val="4C86C6"/>
+                </a:solidFill>
+                <a:latin typeface="Liberation Sans" pitchFamily="34" charset="0"/>
+                <a:ea typeface="Liberation Sans" pitchFamily="34" charset="-122"/>
+                <a:cs typeface="Liberation Sans" pitchFamily="34" charset="-120"/>
+              </a:rPr>
+              <a:t>4</a:t>
+            </a:r>
+            <a:endParaRPr lang="en-US" sz="1200" dirty="0"/>
+          </a:p>
+        </p:txBody>
+      </p:sp>
     </p:spTree>
   </p:cSld>
   <p:clrMapOvr>
